--- a/docs/outputs/App_Description_FitPulse_filled.pptx
+++ b/docs/outputs/App_Description_FitPulse_filled.pptx
@@ -14656,6 +14656,16 @@
               <a:t>History: previous completed sessions.</a:t>
             </a:r>
           </a:p>
+          <a:p>
+            <a:r>
+              <a:rPr sz="1800" b="0">
+                <a:solidFill>
+                  <a:srgbClr val="222222"/>
+                </a:solidFill>
+              </a:rPr>
+              <a:t>Exit Confirmation: exit dialog displayed when pressing back on home screen.</a:t>
+            </a:r>
+          </a:p>
           <a:p/>
           <a:p>
             <a:r>
@@ -14810,6 +14820,16 @@
                 </a:solidFill>
               </a:rPr>
               <a:t>The app focuses on directional focus movement and Back key behavior.</a:t>
+            </a:r>
+          </a:p>
+          <a:p>
+            <a:r>
+              <a:rPr sz="1800" b="0">
+                <a:solidFill>
+                  <a:srgbClr val="222222"/>
+                </a:solidFill>
+              </a:rPr>
+              <a:t>Updated return key policy now includes exit confirmation on home screen.</a:t>
             </a:r>
           </a:p>
         </p:txBody>
@@ -15550,7 +15570,7 @@
                     <a:p>
                       <a:r>
                         <a:rPr sz="1100" b="0"/>
-                        <a:t>Go to the previous screen</a:t>
+                        <a:t>Go to previous screen or show exit confirmation</a:t>
                       </a:r>
                     </a:p>
                   </a:txBody>
@@ -15603,7 +15623,7 @@
                     <a:p>
                       <a:r>
                         <a:rPr sz="1100" b="0"/>
-                        <a:t>Standard Samsung TV behavior</a:t>
+                        <a:t>Exit dialog on home screen</a:t>
                       </a:r>
                     </a:p>
                   </a:txBody>
@@ -18349,6 +18369,16 @@
               <a:t>7. Return to previous screens with the Back key.</a:t>
             </a:r>
           </a:p>
+          <a:p>
+            <a:r>
+              <a:rPr sz="1800" b="0">
+                <a:solidFill>
+                  <a:srgbClr val="222222"/>
+                </a:solidFill>
+              </a:rPr>
+              <a:t>8. Exit application from home screen with confirmation dialog.</a:t>
+            </a:r>
+          </a:p>
           <a:p/>
           <a:p>
             <a:r>

--- a/docs/outputs/App_Description_FitPulse_filled.pptx
+++ b/docs/outputs/App_Description_FitPulse_filled.pptx
@@ -894,8 +894,8 @@
         </p:nvSpPr>
         <p:spPr>
           <a:xfrm>
-            <a:off x="1143225" y="685800"/>
-            <a:ext cx="4572225" cy="3429000"/>
+            <a:off x="1143000" y="685800"/>
+            <a:ext cx="4572000" cy="3429000"/>
           </a:xfrm>
           <a:custGeom>
             <a:avLst/>
@@ -1957,8 +1957,8 @@
         </p:nvSpPr>
         <p:spPr>
           <a:xfrm>
-            <a:off x="1143225" y="685800"/>
-            <a:ext cx="4572225" cy="3429000"/>
+            <a:off x="1143000" y="685800"/>
+            <a:ext cx="4572000" cy="3429000"/>
           </a:xfrm>
           <a:custGeom>
             <a:avLst/>
@@ -15380,30 +15380,6 @@
           </a:p>
         </p:txBody>
       </p:sp>
-      <p:pic>
-        <p:nvPicPr>
-          <p:cNvPr id="195" name="Picture 194" descr="11-menu-function-collage.jpg"/>
-          <p:cNvPicPr>
-            <a:picLocks noChangeAspect="1"/>
-          </p:cNvPicPr>
-          <p:nvPr/>
-        </p:nvPicPr>
-        <p:blipFill>
-          <a:blip r:embed="rId3"/>
-          <a:stretch>
-            <a:fillRect/>
-          </a:stretch>
-        </p:blipFill>
-        <p:spPr>
-          <a:xfrm>
-            <a:off x="467544" y="2471236"/>
-            <a:ext cx="8064896" cy="3672408"/>
-          </a:xfrm>
-          <a:prstGeom prst="rect">
-            <a:avLst/>
-          </a:prstGeom>
-        </p:spPr>
-      </p:pic>
     </p:spTree>
   </p:cSld>
   <p:clrMapOvr>
@@ -19452,30 +19428,6 @@
           </a:p>
         </p:txBody>
       </p:sp>
-      <p:pic>
-        <p:nvPicPr>
-          <p:cNvPr id="188" name="Picture 187" descr="10-usage-scenario-collage.jpg"/>
-          <p:cNvPicPr>
-            <a:picLocks noChangeAspect="1"/>
-          </p:cNvPicPr>
-          <p:nvPr/>
-        </p:nvPicPr>
-        <p:blipFill>
-          <a:blip r:embed="rId3"/>
-          <a:stretch>
-            <a:fillRect/>
-          </a:stretch>
-        </p:blipFill>
-        <p:spPr>
-          <a:xfrm>
-            <a:off x="1056427" y="2928934"/>
-            <a:ext cx="6873159" cy="3929066"/>
-          </a:xfrm>
-          <a:prstGeom prst="rect">
-            <a:avLst/>
-          </a:prstGeom>
-        </p:spPr>
-      </p:pic>
     </p:spTree>
   </p:cSld>
   <p:clrMapOvr>

--- a/docs/outputs/App_Description_FitPulse_filled.pptx
+++ b/docs/outputs/App_Description_FitPulse_filled.pptx
@@ -17,9 +17,9 @@
     <p:sldId id="262" r:id="rId8"/>
     <p:sldId id="263" r:id="rId9"/>
     <p:sldId id="264" r:id="rId10"/>
-    <p:sldId id="268" r:id="rId11"/>
+    <p:sldId id="269" r:id="rId11"/>
     <p:sldId id="265" r:id="rId12"/>
-    <p:sldId id="269" r:id="rId13"/>
+    <p:sldId id="268" r:id="rId13"/>
     <p:sldId id="266" r:id="rId14"/>
     <p:sldId id="267" r:id="rId15"/>
   </p:sldIdLst>
@@ -939,7 +939,7 @@
         <p:cNvPr id="1" name="Shape 189">
           <a:extLst>
             <a:ext uri="{FF2B5EF4-FFF2-40B4-BE49-F238E27FC236}">
-              <a16:creationId xmlns:a16="http://schemas.microsoft.com/office/drawing/2014/main" id="{3A8B8595-A8B8-BF2A-9337-183D578F2924}"/>
+              <a16:creationId xmlns:a16="http://schemas.microsoft.com/office/drawing/2014/main" id="{51C94DDA-2613-1E1A-B534-CC1D20912F50}"/>
             </a:ext>
           </a:extLst>
         </p:cNvPr>
@@ -959,7 +959,7 @@
           <p:cNvPr id="190" name="Google Shape;190;p10:notes">
             <a:extLst>
               <a:ext uri="{FF2B5EF4-FFF2-40B4-BE49-F238E27FC236}">
-                <a16:creationId xmlns:a16="http://schemas.microsoft.com/office/drawing/2014/main" id="{B6D7A151-CE98-2DD3-DD2B-E0D1C09A2759}"/>
+                <a16:creationId xmlns:a16="http://schemas.microsoft.com/office/drawing/2014/main" id="{337C90DA-DBA5-CA0A-1D75-591731857F8D}"/>
               </a:ext>
             </a:extLst>
           </p:cNvPr>
@@ -1003,7 +1003,7 @@
           <p:cNvPr id="191" name="Google Shape;191;p10:notes">
             <a:extLst>
               <a:ext uri="{FF2B5EF4-FFF2-40B4-BE49-F238E27FC236}">
-                <a16:creationId xmlns:a16="http://schemas.microsoft.com/office/drawing/2014/main" id="{B3E70C95-D058-E7FA-0587-2DBC3BC6B60E}"/>
+                <a16:creationId xmlns:a16="http://schemas.microsoft.com/office/drawing/2014/main" id="{E297FFEB-D62E-DDCC-CBA4-483C0D51514E}"/>
               </a:ext>
             </a:extLst>
           </p:cNvPr>
@@ -1048,7 +1048,7 @@
     </p:spTree>
     <p:extLst>
       <p:ext uri="{BB962C8B-B14F-4D97-AF65-F5344CB8AC3E}">
-        <p14:creationId xmlns:p14="http://schemas.microsoft.com/office/powerpoint/2010/main" val="276709474"/>
+        <p14:creationId xmlns:p14="http://schemas.microsoft.com/office/powerpoint/2010/main" val="1893334792"/>
       </p:ext>
     </p:extLst>
   </p:cSld>
@@ -1125,8 +1125,8 @@
         </p:nvSpPr>
         <p:spPr>
           <a:xfrm>
-            <a:off x="1143225" y="685800"/>
-            <a:ext cx="4572225" cy="3429000"/>
+            <a:off x="1143000" y="685800"/>
+            <a:ext cx="4572000" cy="3429000"/>
           </a:xfrm>
           <a:custGeom>
             <a:avLst/>
@@ -1333,8 +1333,8 @@
         </p:nvSpPr>
         <p:spPr>
           <a:xfrm>
-            <a:off x="1143225" y="685800"/>
-            <a:ext cx="4572225" cy="3429000"/>
+            <a:off x="1143000" y="685800"/>
+            <a:ext cx="4572000" cy="3429000"/>
           </a:xfrm>
           <a:custGeom>
             <a:avLst/>
@@ -2002,7 +2002,7 @@
         <p:cNvPr id="1" name="Shape 182">
           <a:extLst>
             <a:ext uri="{FF2B5EF4-FFF2-40B4-BE49-F238E27FC236}">
-              <a16:creationId xmlns:a16="http://schemas.microsoft.com/office/drawing/2014/main" id="{06DBDF70-FC9E-8106-FDD0-81B511D86887}"/>
+              <a16:creationId xmlns:a16="http://schemas.microsoft.com/office/drawing/2014/main" id="{D49EED1C-9236-F837-8F95-4017E110A72C}"/>
             </a:ext>
           </a:extLst>
         </p:cNvPr>
@@ -2022,7 +2022,7 @@
           <p:cNvPr id="183" name="Google Shape;183;p9:notes">
             <a:extLst>
               <a:ext uri="{FF2B5EF4-FFF2-40B4-BE49-F238E27FC236}">
-                <a16:creationId xmlns:a16="http://schemas.microsoft.com/office/drawing/2014/main" id="{8DD57A7A-8B02-94E2-CB7D-405CEA71A650}"/>
+                <a16:creationId xmlns:a16="http://schemas.microsoft.com/office/drawing/2014/main" id="{5A153DF5-EC88-0BA3-0BAB-C0D3CCD087D3}"/>
               </a:ext>
             </a:extLst>
           </p:cNvPr>
@@ -2066,7 +2066,7 @@
           <p:cNvPr id="184" name="Google Shape;184;p9:notes">
             <a:extLst>
               <a:ext uri="{FF2B5EF4-FFF2-40B4-BE49-F238E27FC236}">
-                <a16:creationId xmlns:a16="http://schemas.microsoft.com/office/drawing/2014/main" id="{8E197790-23D1-2EC2-C19B-4D35A9796E0D}"/>
+                <a16:creationId xmlns:a16="http://schemas.microsoft.com/office/drawing/2014/main" id="{21BDF3F2-07DA-8951-65B9-7EB9114234CF}"/>
               </a:ext>
             </a:extLst>
           </p:cNvPr>
@@ -2111,7 +2111,7 @@
     </p:spTree>
     <p:extLst>
       <p:ext uri="{BB962C8B-B14F-4D97-AF65-F5344CB8AC3E}">
-        <p14:creationId xmlns:p14="http://schemas.microsoft.com/office/powerpoint/2010/main" val="897557891"/>
+        <p14:creationId xmlns:p14="http://schemas.microsoft.com/office/powerpoint/2010/main" val="1891422258"/>
       </p:ext>
     </p:extLst>
   </p:cSld>
@@ -15176,7 +15176,7 @@
           <a:lstStyle/>
           <a:p>
             <a:r>
-              <a:t>Your Company Name</a:t>
+              <a:t>MATICONE LTD</a:t>
             </a:r>
           </a:p>
         </p:txBody>
@@ -15396,7 +15396,7 @@
         <p:cNvPr id="1" name="Shape 192">
           <a:extLst>
             <a:ext uri="{FF2B5EF4-FFF2-40B4-BE49-F238E27FC236}">
-              <a16:creationId xmlns:a16="http://schemas.microsoft.com/office/drawing/2014/main" id="{B4B96275-61D0-0DA9-A8AB-AA54939950E6}"/>
+              <a16:creationId xmlns:a16="http://schemas.microsoft.com/office/drawing/2014/main" id="{BA3EEBF5-3F1D-AB95-E223-C04CD1BCA87D}"/>
             </a:ext>
           </a:extLst>
         </p:cNvPr>
@@ -15416,7 +15416,7 @@
           <p:cNvPr id="195" name="Picture 194" descr="11-menu-function-collage.jpg">
             <a:extLst>
               <a:ext uri="{FF2B5EF4-FFF2-40B4-BE49-F238E27FC236}">
-                <a16:creationId xmlns:a16="http://schemas.microsoft.com/office/drawing/2014/main" id="{C2493752-42B2-A17C-BE96-A29B49C3FC2D}"/>
+                <a16:creationId xmlns:a16="http://schemas.microsoft.com/office/drawing/2014/main" id="{54B18D72-8CB6-B46B-0003-ED721F56C075}"/>
               </a:ext>
             </a:extLst>
           </p:cNvPr>
@@ -15433,7 +15433,7 @@
         </p:blipFill>
         <p:spPr>
           <a:xfrm>
-            <a:off x="610157" y="1938535"/>
+            <a:off x="539552" y="1762366"/>
             <a:ext cx="8064896" cy="3672408"/>
           </a:xfrm>
           <a:prstGeom prst="rect">
@@ -15444,7 +15444,7 @@
     </p:spTree>
     <p:extLst>
       <p:ext uri="{BB962C8B-B14F-4D97-AF65-F5344CB8AC3E}">
-        <p14:creationId xmlns:p14="http://schemas.microsoft.com/office/powerpoint/2010/main" val="4039498027"/>
+        <p14:creationId xmlns:p14="http://schemas.microsoft.com/office/powerpoint/2010/main" val="685171399"/>
       </p:ext>
     </p:extLst>
   </p:cSld>
@@ -15589,7 +15589,7 @@
         </p:nvGraphicFramePr>
         <p:xfrm>
           <a:off x="539552" y="2492896"/>
-          <a:ext cx="3000000" cy="3000000"/>
+          <a:ext cx="7920875" cy="3540495"/>
         </p:xfrm>
         <a:graphic>
           <a:graphicData uri="http://schemas.openxmlformats.org/drawingml/2006/table">
@@ -17377,7 +17377,7 @@
           <a:lstStyle/>
           <a:p>
             <a:r>
-              <a:rPr sz="1800" b="0">
+              <a:rPr sz="1800" b="0" dirty="0">
                 <a:solidFill>
                   <a:srgbClr val="222222"/>
                 </a:solidFill>
@@ -17387,12 +17387,69 @@
           </a:p>
           <a:p>
             <a:r>
+              <a:rPr sz="1800" b="0" dirty="0">
+                <a:solidFill>
+                  <a:srgbClr val="222222"/>
+                </a:solidFill>
+              </a:rPr>
+              <a:t>This version supports English only. No in-app language change menu is provided.</a:t>
+            </a:r>
+          </a:p>
+          <a:p>
+            <a:endParaRPr sz="1800" b="0" dirty="0">
+              <a:solidFill>
+                <a:srgbClr val="222222"/>
+              </a:solidFill>
+            </a:endParaRPr>
+          </a:p>
+          <a:p>
+            <a:r>
+              <a:rPr sz="1800" b="0" dirty="0">
+                <a:solidFill>
+                  <a:srgbClr val="222222"/>
+                </a:solidFill>
+              </a:rPr>
+              <a:t>Seller / Support</a:t>
+            </a:r>
+          </a:p>
+          <a:p>
+            <a:r>
+              <a:rPr sz="1800" b="0" dirty="0">
+                <a:solidFill>
+                  <a:srgbClr val="222222"/>
+                </a:solidFill>
+              </a:rPr>
+              <a:t>Seller: MATICONE LTD</a:t>
+            </a:r>
+          </a:p>
+          <a:p>
+            <a:r>
+              <a:rPr sz="1800" b="0" dirty="0">
+                <a:solidFill>
+                  <a:srgbClr val="222222"/>
+                </a:solidFill>
+              </a:rPr>
+              <a:t>Support E-mail: bd@maticone.com</a:t>
+            </a:r>
+          </a:p>
+          <a:p>
+            <a:r>
+              <a:rPr sz="1800" b="0" dirty="0">
+                <a:solidFill>
+                  <a:srgbClr val="222222"/>
+                </a:solidFill>
+              </a:rPr>
+              <a:t>Support URL: https://www.maticone.net/</a:t>
+            </a:r>
+          </a:p>
+          <a:p>
+            <a:r>
               <a:rPr sz="1800" b="0">
                 <a:solidFill>
                   <a:srgbClr val="222222"/>
                 </a:solidFill>
               </a:rPr>
-              <a:t>This version supports English only. No in-app language change menu is provided.</a:t>
+              <a:t>Seller Address: Suite 3366, 5 Brayford Square, London, England E1 0SG</a:t>
             </a:r>
           </a:p>
           <a:p>
@@ -17404,64 +17461,7 @@
           </a:p>
           <a:p>
             <a:r>
-              <a:rPr sz="1800" b="0">
-                <a:solidFill>
-                  <a:srgbClr val="222222"/>
-                </a:solidFill>
-              </a:rPr>
-              <a:t>Seller / Support</a:t>
-            </a:r>
-          </a:p>
-          <a:p>
-            <a:r>
-              <a:rPr sz="1800" b="0">
-                <a:solidFill>
-                  <a:srgbClr val="222222"/>
-                </a:solidFill>
-              </a:rPr>
-              <a:t>Seller: Your Company Name</a:t>
-            </a:r>
-          </a:p>
-          <a:p>
-            <a:r>
-              <a:rPr sz="1800" b="0">
-                <a:solidFill>
-                  <a:srgbClr val="222222"/>
-                </a:solidFill>
-              </a:rPr>
-              <a:t>Support E-mail: your-support@example.com</a:t>
-            </a:r>
-          </a:p>
-          <a:p>
-            <a:r>
-              <a:rPr sz="1800" b="0">
-                <a:solidFill>
-                  <a:srgbClr val="222222"/>
-                </a:solidFill>
-              </a:rPr>
-              <a:t>Support URL: https://your-domain.example</a:t>
-            </a:r>
-          </a:p>
-          <a:p>
-            <a:r>
-              <a:rPr sz="1800" b="0">
-                <a:solidFill>
-                  <a:srgbClr val="222222"/>
-                </a:solidFill>
-              </a:rPr>
-              <a:t>Seller Address: Your Address</a:t>
-            </a:r>
-          </a:p>
-          <a:p>
-            <a:endParaRPr sz="1800" b="0">
-              <a:solidFill>
-                <a:srgbClr val="222222"/>
-              </a:solidFill>
-            </a:endParaRPr>
-          </a:p>
-          <a:p>
-            <a:r>
-              <a:rPr sz="1800" b="0">
+              <a:rPr sz="1800" b="0" dirty="0">
                 <a:solidFill>
                   <a:srgbClr val="222222"/>
                 </a:solidFill>
@@ -17471,17 +17471,33 @@
           </a:p>
           <a:p>
             <a:r>
-              <a:rPr sz="1800" b="0">
+              <a:rPr sz="1800" b="0" dirty="0">
                 <a:solidFill>
                   <a:srgbClr val="222222"/>
                 </a:solidFill>
               </a:rPr>
-              <a:t>This app is a Samsung TV web application package (.wgt).</a:t>
+              <a:t>This app is a Samsung TV web application package (.</a:t>
+            </a:r>
+            <a:r>
+              <a:rPr sz="1800" b="0" dirty="0" err="1">
+                <a:solidFill>
+                  <a:srgbClr val="222222"/>
+                </a:solidFill>
+              </a:rPr>
+              <a:t>wgt</a:t>
+            </a:r>
+            <a:r>
+              <a:rPr sz="1800" b="0" dirty="0">
+                <a:solidFill>
+                  <a:srgbClr val="222222"/>
+                </a:solidFill>
+              </a:rPr>
+              <a:t>).</a:t>
             </a:r>
           </a:p>
           <a:p>
             <a:r>
-              <a:rPr sz="1800" b="0">
+              <a:rPr sz="1800" b="0" dirty="0">
                 <a:solidFill>
                   <a:srgbClr val="222222"/>
                 </a:solidFill>
@@ -17559,7 +17575,7 @@
         </p:nvGraphicFramePr>
         <p:xfrm>
           <a:off x="457200" y="1935163"/>
-          <a:ext cx="3000000" cy="3000000"/>
+          <a:ext cx="8229600" cy="1198910"/>
         </p:xfrm>
         <a:graphic>
           <a:graphicData uri="http://schemas.openxmlformats.org/drawingml/2006/table">
@@ -17704,7 +17720,7 @@
                     <a:p>
                       <a:r>
                         <a:rPr sz="1200" b="0"/>
-                        <a:t>Your Company Name</a:t>
+                        <a:t>MATICONE LTD</a:t>
                       </a:r>
                     </a:p>
                   </a:txBody>
@@ -19444,7 +19460,7 @@
         <p:cNvPr id="1" name="Shape 185">
           <a:extLst>
             <a:ext uri="{FF2B5EF4-FFF2-40B4-BE49-F238E27FC236}">
-              <a16:creationId xmlns:a16="http://schemas.microsoft.com/office/drawing/2014/main" id="{CA8F374A-751C-8E21-77C5-2FBC29F40179}"/>
+              <a16:creationId xmlns:a16="http://schemas.microsoft.com/office/drawing/2014/main" id="{D847D0A2-AE42-F3AF-B029-CFE04EAC1785}"/>
             </a:ext>
           </a:extLst>
         </p:cNvPr>
@@ -19464,7 +19480,7 @@
           <p:cNvPr id="188" name="Picture 187" descr="10-usage-scenario-collage.jpg">
             <a:extLst>
               <a:ext uri="{FF2B5EF4-FFF2-40B4-BE49-F238E27FC236}">
-                <a16:creationId xmlns:a16="http://schemas.microsoft.com/office/drawing/2014/main" id="{CA49D48E-6B22-7FBA-39EA-51B56691CB8B}"/>
+                <a16:creationId xmlns:a16="http://schemas.microsoft.com/office/drawing/2014/main" id="{EBF52256-B6D2-208B-216B-1E2F053B82FC}"/>
               </a:ext>
             </a:extLst>
           </p:cNvPr>
@@ -19481,7 +19497,7 @@
         </p:blipFill>
         <p:spPr>
           <a:xfrm>
-            <a:off x="997704" y="1741892"/>
+            <a:off x="901230" y="1641224"/>
             <a:ext cx="6873159" cy="3929066"/>
           </a:xfrm>
           <a:prstGeom prst="rect">
@@ -19492,7 +19508,7 @@
     </p:spTree>
     <p:extLst>
       <p:ext uri="{BB962C8B-B14F-4D97-AF65-F5344CB8AC3E}">
-        <p14:creationId xmlns:p14="http://schemas.microsoft.com/office/powerpoint/2010/main" val="3399746175"/>
+        <p14:creationId xmlns:p14="http://schemas.microsoft.com/office/powerpoint/2010/main" val="3338343769"/>
       </p:ext>
     </p:extLst>
   </p:cSld>

--- a/docs/outputs/App_Description_FitPulse_filled.pptx
+++ b/docs/outputs/App_Description_FitPulse_filled.pptx
@@ -17571,7 +17571,13 @@
         <p:nvGraphicFramePr>
           <p:cNvPr id="123" name="Google Shape;123;p17"/>
           <p:cNvGraphicFramePr/>
-          <p:nvPr/>
+          <p:nvPr>
+            <p:extLst>
+              <p:ext uri="{D42A27DB-BD31-4B8C-83A1-F6EECF244321}">
+                <p14:modId xmlns:p14="http://schemas.microsoft.com/office/powerpoint/2010/main" val="2727855000"/>
+              </p:ext>
+            </p:extLst>
+          </p:nvPr>
         </p:nvGraphicFramePr>
         <p:xfrm>
           <a:off x="457200" y="1935163"/>
@@ -17680,9 +17686,14 @@
                     <a:lstStyle/>
                     <a:p>
                       <a:r>
-                        <a:rPr sz="1200" b="0"/>
+                        <a:rPr sz="1200" b="0" dirty="0"/>
                         <a:t>1.0</a:t>
                       </a:r>
+                      <a:r>
+                        <a:rPr lang="en-US" sz="1200" b="0" dirty="0"/>
+                        <a:t>.2</a:t>
+                      </a:r>
+                      <a:endParaRPr sz="1200" b="0" dirty="0"/>
                     </a:p>
                   </a:txBody>
                   <a:tcPr marL="91450" marR="91450" marT="45725" marB="45725"/>
@@ -17693,8 +17704,16 @@
                     <a:lstStyle/>
                     <a:p>
                       <a:r>
-                        <a:rPr sz="1200" b="0"/>
-                        <a:t>March 19, 2026</a:t>
+                        <a:rPr sz="1200" b="0" dirty="0"/>
+                        <a:t>March </a:t>
+                      </a:r>
+                      <a:r>
+                        <a:rPr lang="en-US" sz="1200" b="0" dirty="0"/>
+                        <a:t>25</a:t>
+                      </a:r>
+                      <a:r>
+                        <a:rPr sz="1200" b="0" dirty="0"/>
+                        <a:t>, 2026</a:t>
                       </a:r>
                     </a:p>
                   </a:txBody>
@@ -17768,7 +17787,7 @@
                     <a:bodyPr/>
                     <a:lstStyle/>
                     <a:p>
-                      <a:endParaRPr/>
+                      <a:endParaRPr dirty="0"/>
                     </a:p>
                   </a:txBody>
                   <a:tcPr marL="91450" marR="91450" marT="45725" marB="45725"/>
